--- a/docs/周到-第2次阶段性评审.pptx
+++ b/docs/周到-第2次阶段性评审.pptx
@@ -6455,7 +6455,7 @@
                 <a:ea typeface="微软雅黑"/>
                 <a:cs typeface="微软雅黑"/>
               </a:rPr>
-              <a:t>验收：25 个用例覆盖三条链路，全项目 67 项全绿</a:t>
+              <a:t>验收：26 个用例覆盖三条链路，全项目 67 项全绿</a:t>
             </a:r>
           </a:p>
         </p:txBody>
@@ -6789,7 +6789,7 @@
                 <a:ea typeface="微软雅黑"/>
                 <a:cs typeface="微软雅黑"/>
               </a:rPr>
-              <a:t>15</a:t>
+              <a:t>14</a:t>
             </a:r>
           </a:p>
         </p:txBody>
@@ -7035,7 +7035,7 @@
                 <a:ea typeface="微软雅黑"/>
                 <a:cs typeface="微软雅黑"/>
               </a:rPr>
-              <a:t>11</a:t>
+              <a:t>9</a:t>
             </a:r>
           </a:p>
         </p:txBody>
